--- a/content/decks/media-studies/media-studies-s1-lesson-05-narrative-and-the-planning-lock.pptx
+++ b/content/decks/media-studies/media-studies-s1-lesson-05-narrative-and-the-planning-lock.pptx
@@ -1216,7 +1216,7 @@
           <a:p>
             <a:r>
               <a:rPr lang="en-US" dirty="0"/>
-              <a:t>The Rubens-sketch framing is the headline metaphor of the lock: a plan complete enough to hand off.</a:t>
+              <a:t>The Rubens sketch sets the standard for the lock: a plan complete enough to hand off.</a:t>
             </a:r>
             <a:endParaRPr lang="en-US" dirty="0"/>
           </a:p>
@@ -5215,19 +5215,22 @@
         <p:spPr>
           <a:xfrm>
             <a:off x="822960" y="5715000"/>
-            <a:ext cx="10543032" cy="365760"/>
-          </a:xfrm>
-          <a:prstGeom prst="rect">
-            <a:avLst/>
-          </a:prstGeom>
-          <a:noFill/>
-          <a:ln/>
-        </p:spPr>
-        <p:txBody>
-          <a:bodyPr wrap="square" lIns="0" tIns="0" rIns="0" bIns="0" rtlCol="0" anchor="ctr"/>
+            <a:ext cx="10543032" cy="594360"/>
+          </a:xfrm>
+          <a:prstGeom prst="rect">
+            <a:avLst/>
+          </a:prstGeom>
+          <a:noFill/>
+          <a:ln/>
+        </p:spPr>
+        <p:txBody>
+          <a:bodyPr wrap="square" lIns="0" tIns="0" rIns="0" bIns="0" rtlCol="0" anchor="t"/>
           <a:lstStyle/>
           <a:p>
             <a:pPr indent="0" marL="0">
+              <a:lnSpc>
+                <a:spcPts val="1600"/>
+              </a:lnSpc>
               <a:buNone/>
             </a:pPr>
             <a:r>
@@ -5239,7 +5242,7 @@
                 <a:ea typeface="Arial" pitchFamily="34" charset="-122"/>
                 <a:cs typeface="Arial" pitchFamily="34" charset="-120"/>
               </a:rPr>
-              <a:t>The century-old caveat: folk tales, 1928. Apply with judgment; who is your donor, and do you even have one?</a:t>
+              <a:t>The caveat: folk tales, 1928; apply with judgment. Dealt as Sort Wars cards: rebuild a scrambled tale, then ask your own opening: who is your donor, and do you even have one?</a:t>
             </a:r>
             <a:endParaRPr lang="en-US" sz="1200" dirty="0"/>
           </a:p>
@@ -5555,7 +5558,7 @@
       </p:grpSpPr>
       <p:pic>
         <p:nvPicPr>
-          <p:cNvPr id="2" name="Image 0" descr="/private/tmp/claude-501/-Users-dogan-Documents-Vaults-Courses/a3a5132d-721f-4cd4-8ddd-e62e2b37b51b/scratchpad/img/crops/rubens-sketch_a664.jpg">    </p:cNvPr>
+          <p:cNvPr id="2" name="Image 0" descr="/Users/dogan/Documents/Vaults/Courses/wiki/classes/media-studies/decks/_build/img/crops/rubens-sketch_a664.jpg">    </p:cNvPr>
           <p:cNvPicPr>
             <a:picLocks noChangeAspect="1"/>
           </p:cNvPicPr>
@@ -6975,19 +6978,22 @@
         <p:spPr>
           <a:xfrm>
             <a:off x="822960" y="5257800"/>
-            <a:ext cx="10543032" cy="457200"/>
-          </a:xfrm>
-          <a:prstGeom prst="rect">
-            <a:avLst/>
-          </a:prstGeom>
-          <a:noFill/>
-          <a:ln/>
-        </p:spPr>
-        <p:txBody>
-          <a:bodyPr wrap="square" lIns="0" tIns="0" rIns="0" bIns="0" rtlCol="0" anchor="ctr"/>
+            <a:ext cx="10543032" cy="640080"/>
+          </a:xfrm>
+          <a:prstGeom prst="rect">
+            <a:avLst/>
+          </a:prstGeom>
+          <a:noFill/>
+          <a:ln/>
+        </p:spPr>
+        <p:txBody>
+          <a:bodyPr wrap="square" lIns="0" tIns="0" rIns="0" bIns="0" rtlCol="0" anchor="t"/>
           <a:lstStyle/>
           <a:p>
             <a:pPr indent="0" marL="0">
+              <a:lnSpc>
+                <a:spcPts val="1700"/>
+              </a:lnSpc>
               <a:buNone/>
             </a:pPr>
             <a:r>
@@ -6999,7 +7005,7 @@
                 <a:ea typeface="Arial" pitchFamily="34" charset="-122"/>
                 <a:cs typeface="Arial" pitchFamily="34" charset="-120"/>
               </a:rPr>
-              <a:t>Locked means locked: changes after the lock are documented decisions in the production diary, not silent swaps.</a:t>
+              <a:t>Run as launch clearance: ten green lights or the plan does not fly. Locked means locked: later changes are documented decisions in the diary, not silent swaps.</a:t>
             </a:r>
             <a:endParaRPr lang="en-US" sz="1250" dirty="0"/>
           </a:p>
@@ -7133,7 +7139,7 @@
       </p:grpSpPr>
       <p:pic>
         <p:nvPicPr>
-          <p:cNvPr id="2" name="Image 0" descr="/private/tmp/claude-501/-Users-dogan-Documents-Vaults-Courses/a3a5132d-721f-4cd4-8ddd-e62e2b37b51b/scratchpad/img/crops/bruegel-wedding_a1777.jpg">    </p:cNvPr>
+          <p:cNvPr id="2" name="Image 0" descr="/Users/dogan/Documents/Vaults/Courses/wiki/classes/media-studies/decks/_build/img/crops/bruegel-wedding_a1777.jpg">    </p:cNvPr>
           <p:cNvPicPr>
             <a:picLocks noChangeAspect="1"/>
           </p:cNvPicPr>
